--- a/Presentation/UpdatePre/design/Stock_Financial_Analysis_Final_With_PctChangeChart.pptx
+++ b/Presentation/UpdatePre/design/Stock_Financial_Analysis_Final_With_PctChangeChart.pptx
@@ -228,7 +228,7 @@
                   <c:v>0.33759658063455533</c:v>
                 </c:pt>
                 <c:pt idx="9">
-                  <c:v>0.014518439180621167</c:v>
+                  <c:v>0.014376898437724819</c:v>
                 </c:pt>
                 <c:pt idx="10">
                   <c:v>0.15603594717518768</c:v>
@@ -14835,7 +14835,7 @@
             </a:r>
             <a:br/>
             <a:r>
-              <a:t>30/04/2025</a:t>
+              <a:t>02/05/2025</a:t>
             </a:r>
           </a:p>
         </p:txBody>
@@ -15113,7 +15113,7 @@
               <a:defRPr sz="2400"/>
             </a:pPr>
             <a:r>
-              <a:t>Ticker: DMTC</a:t>
+              <a:t>Ticker: TICK</a:t>
             </a:r>
           </a:p>
           <a:p>
